--- a/docs/FinConsent-Client-Presentation.pptx
+++ b/docs/FinConsent-Client-Presentation.pptx
@@ -3265,7 +3265,7 @@
               </a:defRPr>
             </a:pPr>
             <a:r>
-              <a:t>Purpose-built for SEBI (Investment Advisers) Regulations, 2013 Regulation 19 compliance, pre-trade capital gains tax transparency under Finance Act 2024, and Section 65B tamper-evident electronic evidence.</a:t>
+              <a:t>Engineered to support SEBI (Investment Advisers) Regulations, 2013 Regulation 19 compliance, pre-trade capital gains tax transparency under Finance Act 2024, and Section 63 of Bharatiya Sakshya Adhiniyam, 2023 (BSA) tamper-evident electronic evidence.</a:t>
             </a:r>
           </a:p>
         </p:txBody>
@@ -3345,7 +3345,7 @@
               </a:defRPr>
             </a:pPr>
             <a:r>
-              <a:t>SEBI Regulation 19 Compliance</a:t>
+              <a:t>SEBI Regulation 19 Record-Keeping</a:t>
             </a:r>
           </a:p>
           <a:p>
@@ -3357,7 +3357,7 @@
               </a:defRPr>
             </a:pPr>
             <a:r>
-              <a:t>Enforces non-discretionary prior informed client consent with a statutory 5-year cryptographic audit trail.</a:t>
+              <a:t>Operationalizes non-discretionary prior client consent with an immutable 5-year cryptographic audit trail for investment advice and rationale.</a:t>
             </a:r>
           </a:p>
         </p:txBody>
@@ -3437,7 +3437,7 @@
               </a:defRPr>
             </a:pPr>
             <a:r>
-              <a:t>Budget 2024 Tax Engine</a:t>
+              <a:t>Finance Act 2024 Tax Engine</a:t>
             </a:r>
           </a:p>
           <a:p>
@@ -3449,7 +3449,7 @@
               </a:defRPr>
             </a:pPr>
             <a:r>
-              <a:t>Automates STCG (20%) &amp; LTCG (12.5%) pre-computations with Section 234B/C quarterly advance tax alerts.</a:t>
+              <a:t>Pre-computes STCG (20%) &amp; LTCG (12.5% + 4% cess) with quarterly advance tax alerts (Section 208 / 234C).</a:t>
             </a:r>
           </a:p>
         </p:txBody>
@@ -3529,7 +3529,7 @@
               </a:defRPr>
             </a:pPr>
             <a:r>
-              <a:t>Cryptographic Evidence</a:t>
+              <a:t>Section 63 BSA Electronic Evidence</a:t>
             </a:r>
           </a:p>
           <a:p>
@@ -3541,7 +3541,7 @@
               </a:defRPr>
             </a:pPr>
             <a:r>
-              <a:t>Dual AES-256-GCM envelope encryption, 6-digit OTP, and Section 65B Indian Evidence Act certificates.</a:t>
+              <a:t>Dual-envelope AES-256-GCM encryption, 6-digit OTP verification, and tamper-evident SHA-256 compliance receipts.</a:t>
             </a:r>
           </a:p>
         </p:txBody>
@@ -3825,11 +3825,11 @@
               </a:defRPr>
             </a:pPr>
             <a:r>
-              <a:t>• Zero PII Exposure: If a magic link is forwarded, intercepted, or leaked, the recipient sees only the adviser's firm name. Zero stock holdings or tax figures are emitted.</a:t>
-            </a:r>
-            <a:br/>
-            <a:r>
-              <a:t>• Deterministic Derivation: Password formatted as Last 4 PAN digits + Date of Birth (DDMMYYYY). Example: Rohan's PAN ABCDE1234F + 14/08/1978 = 123414081978.</a:t>
+              <a:t>• Zero PII Exposure Prior to Unlock: If a magic link is forwarded, intercepted, or leaked, the recipient sees only the adviser's firm name. Zero stock holdings or tax figures are emitted.</a:t>
+            </a:r>
+            <a:br/>
+            <a:r>
+              <a:t>• Deterministic Verification PIN: Password formatted as Last 4 PAN digits + Date of Birth (DDMMYYYY). Example: Rohan's PAN XXXXX1234F + 14/08/1978 = 123414081978.</a:t>
             </a:r>
             <a:br/>
             <a:r>
@@ -3837,7 +3837,7 @@
             </a:r>
             <a:br/>
             <a:r>
-              <a:t>• Brute-Force Rate Limiting: 5 consecutive failed attempts trigger an automatic 15-minute security lockout (HTTP 429).</a:t>
+              <a:t>• Online &amp; Offline Defenses: Acknowledges finite PIN entropy (~10^12 combinations); defended online by sliding-window rate limiters (5 failed attempts -&gt; 15 min lockout) and offline by salted PBKDF2.</a:t>
             </a:r>
           </a:p>
         </p:txBody>
@@ -4125,7 +4125,7 @@
             </a:r>
             <a:br/>
             <a:r>
-              <a:t>• Zero Cross-RIA Data Leakage: RIA 1 attempting to query Client 201 or Mandate 101 of RIA 2 receives an immediate HTTP 403 Forbidden with zero data disclosure.</a:t>
+              <a:t>• Zero Cross-RIA Data Leakage: RIA 1 attempting to query Client or Mandate of RIA 2 receives an immediate HTTP 403 Forbidden with zero data disclosure.</a:t>
             </a:r>
             <a:br/>
             <a:r>
@@ -4464,7 +4464,7 @@
               </a:defRPr>
             </a:pPr>
             <a:r>
-              <a:t>• Server Wrapping: DEK encrypted with Server Master Key via AES-256-GCM for RIA dashboard access.</a:t>
+              <a:t>• Server Wrapping: DEK encrypted with isolated Server Master Key (SERVER_MASTER_KEY) via AES-256-GCM for RIA dashboard access.</a:t>
             </a:r>
             <a:br/>
             <a:r>
@@ -4571,7 +4571,7 @@
             </a:r>
             <a:br/>
             <a:r>
-              <a:t>• In-Transit Security: Forced TLS 1.3 with Helmet HSTS (1-year max-age).</a:t>
+              <a:t>• In-Transit Security: Forced TLS 1.3 with Helmet HSTS (1-year max-age: 31,536,000 seconds).</a:t>
             </a:r>
             <a:br/>
             <a:r>
@@ -4704,7 +4704,7 @@
               </a:defRPr>
             </a:pPr>
             <a:r>
-              <a:t>Statutory multi-factor verification guaranteeing explicit non-discretionary consent.</a:t>
+              <a:t>Statutory verification guaranteeing explicit non-discretionary consent.</a:t>
             </a:r>
           </a:p>
         </p:txBody>
@@ -4859,11 +4859,11 @@
               </a:defRPr>
             </a:pPr>
             <a:r>
-              <a:t>• Mandatory Declarations: Clients must actively check 3 statutory declarations (Regulation 19 Informed Consent, Capital Gains Acceptance, Section 65B Electronic Evidence).</a:t>
-            </a:r>
-            <a:br/>
-            <a:r>
-              <a:t>• Dynamic 6-Digit OTP: Generated via CSPRNG with 5-minute Time-To-Live (TTL).</a:t>
+              <a:t>• Mandatory Declarations: Clients must actively check 3 statutory declarations (Regulation 19 Informed Consent, Capital Gains Acceptance, Section 63 BSA Electronic Evidence).</a:t>
+            </a:r>
+            <a:br/>
+            <a:r>
+              <a:t>• Dynamic 6-Digit OTP: Generated via CSPRNG with 5-minute Time-To-Live (TTL); delivered via registered email and in-app display (SMS disabled by policy; WhatsApp roadmap).</a:t>
             </a:r>
             <a:br/>
             <a:r>
@@ -5000,7 +5000,7 @@
               </a:defRPr>
             </a:pPr>
             <a:r>
-              <a:t>Chained SHA-256 audit ledger meeting Section 65B and Regulation 19 standards.</a:t>
+              <a:t>Chained SHA-256 audit ledger meeting Section 63 BSA and SEBI Regulation 19 standards.</a:t>
             </a:r>
           </a:p>
         </p:txBody>
@@ -5060,7 +5060,7 @@
               </a:defRPr>
             </a:pPr>
             <a:r>
-              <a:t>Figure 14.1: Section 65B Indian Evidence Act Compliance Receipt issued upon successful consent.</a:t>
+              <a:t>Figure 14.1: Section 63 BSA / Section 65B Compliance Receipt issued upon successful consent.</a:t>
             </a:r>
           </a:p>
         </p:txBody>
@@ -5159,11 +5159,11 @@
             </a:r>
             <a:br/>
             <a:r>
-              <a:t>• Section 65B Certificate: Captures client device IP (49.36.110.12), browser User-Agent, exact IST timestamp, and masked PAN (AB*****4F).</a:t>
-            </a:r>
-            <a:br/>
-            <a:r>
-              <a:t>• 5-Year Regulatory Preservation: Designed to satisfy SEBI Regulation 19 mandatory 5-year retention requirements.</a:t>
+              <a:t>• Section 63 BSA Certificate: Captures client device IP (RFC 5737 203.0.113.12), browser User-Agent, exact IST timestamp, and masked PAN (XXXXX1234F).</a:t>
+            </a:r>
+            <a:br/>
+            <a:r>
+              <a:t>• 5-Year Regulatory Preservation: Designed to satisfy SEBI Regulation 19 mandatory 5-year retention requirements for investment advice and rationale.</a:t>
             </a:r>
             <a:br/>
             <a:r>
@@ -5369,7 +5369,7 @@
           <a:lstStyle/>
           <a:p>
             <a:pPr>
-              <a:defRPr sz="1100">
+              <a:defRPr sz="1050">
                 <a:solidFill>
                   <a:srgbClr val="0A192F"/>
                 </a:solidFill>
@@ -5377,103 +5377,127 @@
               </a:defRPr>
             </a:pPr>
             <a:r>
-              <a:t>                     ┌──────────────────────────────────────────────┐</a:t>
-            </a:r>
-            <a:br/>
-            <a:r>
-              <a:t>                     │                                              │</a:t>
-            </a:r>
-            <a:br/>
-            <a:r>
-              <a:t>                     ▼                                              │</a:t>
-            </a:r>
-            <a:br/>
-            <a:r>
-              <a:t>                ┌─────────┐      RIA Dispatches Link       ┌──────────┐</a:t>
-            </a:r>
-            <a:br/>
-            <a:r>
-              <a:t>                │  DRAFT  │ ─────────────────────────────&gt; │   SENT   │</a:t>
-            </a:r>
-            <a:br/>
-            <a:r>
-              <a:t>                └─────────┘                                └──────────┘</a:t>
-            </a:r>
-            <a:br/>
-            <a:r>
-              <a:t>                     │                                          │</a:t>
-            </a:r>
-            <a:br/>
-            <a:r>
-              <a:t>                     │                                          │ Client Inputs</a:t>
-            </a:r>
-            <a:br/>
-            <a:r>
-              <a:t>                     │                                          │ PAN + DOB Password</a:t>
-            </a:r>
-            <a:br/>
-            <a:r>
-              <a:t>                     │                                          ▼</a:t>
-            </a:r>
-            <a:br/>
-            <a:r>
-              <a:t>                     │                                     ┌──────────┐</a:t>
-            </a:r>
-            <a:br/>
-            <a:r>
-              <a:t>                     │                                     │  VIEWED  │ (In Review)</a:t>
-            </a:r>
-            <a:br/>
-            <a:r>
-              <a:t>                     │                                     └──────────┘</a:t>
-            </a:r>
-            <a:br/>
-            <a:r>
-              <a:t>                     │                                          │</a:t>
-            </a:r>
-            <a:br/>
-            <a:r>
-              <a:t>                     │                                          │ 1. Accept Declarations</a:t>
-            </a:r>
-            <a:br/>
-            <a:r>
-              <a:t>                     │ 48-Hour Cutoff                           │ 2. Verify 6-Digit OTP</a:t>
-            </a:r>
-            <a:br/>
-            <a:r>
-              <a:t>                     │ Elapsed                                  ▼</a:t>
-            </a:r>
-            <a:br/>
-            <a:r>
-              <a:t>                     │                                     ┌───────────┐</a:t>
-            </a:r>
-            <a:br/>
-            <a:r>
-              <a:t>                     └───────────────────────────────────&gt; │ CONSENTED │ (Immutable Lock)</a:t>
-            </a:r>
-            <a:br/>
-            <a:r>
-              <a:t>                                                           └───────────┘</a:t>
-            </a:r>
-            <a:br/>
-            <a:r>
-              <a:t>                                                                │</a:t>
-            </a:r>
-            <a:br/>
-            <a:r>
-              <a:t>                                                                ▼</a:t>
-            </a:r>
-            <a:br/>
-            <a:r>
-              <a:t>                                                           ┌───────────┐</a:t>
-            </a:r>
-            <a:br/>
-            <a:r>
-              <a:t>                                                           │  REVOKED  │ (Manual RIA Revoke</a:t>
-            </a:r>
-            <a:br/>
-            <a:r>
-              <a:t>                                                           └───────────┘  or Expired Link)</a:t>
+              <a:t>               ┌────────────────────────────────────────────────────────┐</a:t>
+            </a:r>
+            <a:br/>
+            <a:r>
+              <a:t>               │                                                        │</a:t>
+            </a:r>
+            <a:br/>
+            <a:r>
+              <a:t>               ▼                                                        │</a:t>
+            </a:r>
+            <a:br/>
+            <a:r>
+              <a:t>          ┌─────────┐            RIA Dispatches Link       ┌──────────┐ │</a:t>
+            </a:r>
+            <a:br/>
+            <a:r>
+              <a:t>          │  DRAFT  │ ───────────────────────────────────&gt; │   SENT   │ │</a:t>
+            </a:r>
+            <a:br/>
+            <a:r>
+              <a:t>          └─────────┘                                      └──────────┘ │</a:t>
+            </a:r>
+            <a:br/>
+            <a:r>
+              <a:t>               │                                                │       │</a:t>
+            </a:r>
+            <a:br/>
+            <a:r>
+              <a:t>               │                                                │ Client Inputs</a:t>
+            </a:r>
+            <a:br/>
+            <a:r>
+              <a:t>               │                                                │ PAN + DOB Password</a:t>
+            </a:r>
+            <a:br/>
+            <a:r>
+              <a:t>               │                                                ▼       │</a:t>
+            </a:r>
+            <a:br/>
+            <a:r>
+              <a:t>               │                                           ┌──────────┐ │</a:t>
+            </a:r>
+            <a:br/>
+            <a:r>
+              <a:t>               │                                           │  VIEWED  │ │ (In Review)</a:t>
+            </a:r>
+            <a:br/>
+            <a:r>
+              <a:t>               │                                           └──────────┘ │</a:t>
+            </a:r>
+            <a:br/>
+            <a:r>
+              <a:t>               │                                                │       │</a:t>
+            </a:r>
+            <a:br/>
+            <a:r>
+              <a:t>               │                                                │ 1. Accept Declarations</a:t>
+            </a:r>
+            <a:br/>
+            <a:r>
+              <a:t>               │ 48-Hour Cutoff                                 │ 2. Verify 6-Digit OTP</a:t>
+            </a:r>
+            <a:br/>
+            <a:r>
+              <a:t>               │ Elapsed                                        ▼       │</a:t>
+            </a:r>
+            <a:br/>
+            <a:r>
+              <a:t>               │                                           ┌───────────┐│</a:t>
+            </a:r>
+            <a:br/>
+            <a:r>
+              <a:t>               ├─────────────────────────────────────────&gt; │ CONSENTED ││ (Immutable Lock)</a:t>
+            </a:r>
+            <a:br/>
+            <a:r>
+              <a:t>               │                                           └───────────┘│</a:t>
+            </a:r>
+            <a:br/>
+            <a:r>
+              <a:t>               │                                                        │</a:t>
+            </a:r>
+            <a:br/>
+            <a:r>
+              <a:t>               │ Advisory Revocation / Market Drift                     │</a:t>
+            </a:r>
+            <a:br/>
+            <a:r>
+              <a:t>               ▼                                                        │</a:t>
+            </a:r>
+            <a:br/>
+            <a:r>
+              <a:t>          ┌─────────┐                                                   │</a:t>
+            </a:r>
+            <a:br/>
+            <a:r>
+              <a:t>          │ REVOKED │ &lt;─────────────────────────────────────────────────┘ (Manual RIA Revoke)</a:t>
+            </a:r>
+            <a:br/>
+            <a:r>
+              <a:t>          └─────────┘</a:t>
+            </a:r>
+            <a:br/>
+            <a:r>
+              <a:t>               ▲</a:t>
+            </a:r>
+            <a:br/>
+            <a:r>
+              <a:t>               │ Cutoff Elapsed Prior to Consent</a:t>
+            </a:r>
+            <a:br/>
+            <a:r>
+              <a:t>          ┌─────────┐</a:t>
+            </a:r>
+            <a:br/>
+            <a:r>
+              <a:t>          │ EXPIRED │ (48h Window Elapsed)</a:t>
+            </a:r>
+            <a:br/>
+            <a:r>
+              <a:t>          └─────────┘</a:t>
             </a:r>
           </a:p>
         </p:txBody>
@@ -5769,7 +5793,7 @@
             </a:r>
             <a:br/>
             <a:r>
-              <a:t>• Uncompromising Consent Rail: Trade execution strictly requires formal statutory declaration checkboxes followed by 6-digit Mobile OTP verification.</a:t>
+              <a:t>• Uncompromising Consent Rail: Trade authorization strictly requires formal statutory declaration checkboxes followed by 6-digit OTP verification.</a:t>
             </a:r>
           </a:p>
         </p:txBody>
@@ -5898,7 +5922,7 @@
               </a:defRPr>
             </a:pPr>
             <a:r>
-              <a:t>Eliminating investor tax shocks with pre-trade Union Budget 2024 calculations.</a:t>
+              <a:t>Eliminating investor tax shocks with pre-trade Finance Act 2024 calculations.</a:t>
             </a:r>
           </a:p>
         </p:txBody>
@@ -5978,7 +6002,7 @@
               </a:defRPr>
             </a:pPr>
             <a:r>
-              <a:t>Union Budget 2024 Statutory Engine</a:t>
+              <a:t>Finance Act 2024 Statutory Engine</a:t>
             </a:r>
           </a:p>
           <a:p>
@@ -5986,7 +6010,7 @@
               <a:spcBef>
                 <a:spcPts val="800"/>
               </a:spcBef>
-              <a:defRPr sz="1100">
+              <a:defRPr sz="1050">
                 <a:solidFill>
                   <a:srgbClr val="475569"/>
                 </a:solidFill>
@@ -6014,11 +6038,11 @@
             </a:r>
             <a:br/>
             <a:r>
-              <a:t>  Applied above ₹1,25,000 exemption limit.</a:t>
-            </a:r>
-            <a:br/>
-            <a:r>
-              <a:t>  ₹1,25,000 gain on HDFC Bank is 100% exempt = ₹0</a:t>
+              <a:t>  Applied above annual aggregate ₹1,25,000 exemption limit.</a:t>
+            </a:r>
+            <a:br/>
+            <a:r>
+              <a:t>  ₹1,25,000 gain on HDFC Bank is exempt = ₹0</a:t>
             </a:r>
             <a:br/>
             <a:br/>
@@ -6028,7 +6052,12 @@
             <a:br/>
             <a:br/>
             <a:r>
-              <a:t>• Total Rupee Tax Liability: ₹11,440</a:t>
+              <a:t>• Estimated Rupee Tax Liability: ₹11,440</a:t>
+            </a:r>
+            <a:br/>
+            <a:br/>
+            <a:r>
+              <a:t>• Tax Disclaimers: Excludes individual surcharges (up to 15% on equity capital gains) and prior carried-forward losses. Decision-support estimate only.</a:t>
             </a:r>
           </a:p>
         </p:txBody>
@@ -6108,7 +6137,7 @@
               </a:defRPr>
             </a:pPr>
             <a:r>
-              <a:t>Advance Tax Compliance Calendar (Sec 234B &amp; 234C)</a:t>
+              <a:t>Advance Tax Planning &amp; Caveats (Sec 208 &amp; 234C)</a:t>
             </a:r>
           </a:p>
           <a:p>
@@ -6116,14 +6145,14 @@
               <a:spcBef>
                 <a:spcPts val="800"/>
               </a:spcBef>
-              <a:defRPr sz="1100">
+              <a:defRPr sz="1050">
                 <a:solidFill>
                   <a:srgbClr val="475569"/>
                 </a:solidFill>
               </a:defRPr>
             </a:pPr>
             <a:r>
-              <a:t>When net estimated gains exceed ₹1,00,000, FinConsent automatically generates an Advance Tax Banner detailing quarterly installment deadlines:</a:t>
+              <a:t>Advance tax applies when estimated net annual tax liability reaches or exceeds ₹10,000, displaying statutory installment deadlines:</a:t>
             </a:r>
             <a:br/>
             <a:br/>
@@ -6145,7 +6174,7 @@
             <a:br/>
             <a:br/>
             <a:r>
-              <a:t>Protects clients against 1% monthly statutory penal interest for deferred tax compliance.</a:t>
+              <a:t>• Proviso to Section 234C: Relieves penal interest for installments prior to the capital gains realization date if remaining tax is paid in subsequent installments.</a:t>
             </a:r>
           </a:p>
         </p:txBody>
@@ -6261,7 +6290,7 @@
               </a:defRPr>
             </a:pPr>
             <a:r>
-              <a:t>Multilingual Localization: 8 Indian Languages</a:t>
+              <a:t>Multilingual Localization Capability: 8 Languages</a:t>
             </a:r>
           </a:p>
           <a:p>
@@ -6274,7 +6303,7 @@
               </a:defRPr>
             </a:pPr>
             <a:r>
-              <a:t>Delivering advisory transparency in the investor's native language.</a:t>
+              <a:t>Delivering advisory transparency in regional and international languages.</a:t>
             </a:r>
           </a:p>
         </p:txBody>
@@ -6369,11 +6398,11 @@
               </a:defRPr>
             </a:pPr>
             <a:r>
-              <a:t>• 8 Supported Indian Languages: English (en), Hindi (hi), Marathi (mr), Gujarati (gu), Tamil (ta), Telugu (te), Kannada (kn), Bengali (bn).</a:t>
-            </a:r>
-            <a:br/>
-            <a:r>
-              <a:t>• Universal Accessibility: HNIs across Tier 1, 2, and 3 wealth corridors review proposals, disclosures, and receipts in their preferred regional language.</a:t>
+              <a:t>• 8 Supported Languages: English (en), Hindi (hi), Tamil (ta), Bengali (bn), Gujarati (gu), German (de), Japanese (ja), Korean (ko).</a:t>
+            </a:r>
+            <a:br/>
+            <a:r>
+              <a:t>• Universal Accessibility: HNIs review proposals, disclosures, and receipts in their preferred language.</a:t>
             </a:r>
             <a:br/>
             <a:r>
@@ -6623,7 +6652,7 @@
             </a:r>
             <a:br/>
             <a:r>
-              <a:t>│   • JWT Auth &amp; Distributed Session Blacklist           • Distributed Sliding Rate Limit│</a:t>
+              <a:t>│   • JWT Auth &amp; TOTP Staff MFA                          • Distributed Sliding Rate Limit│</a:t>
             </a:r>
             <a:br/>
             <a:r>
@@ -6647,7 +6676,7 @@
             </a:r>
             <a:br/>
             <a:r>
-              <a:t>│   • Mandate State Machine Engine                       • Union Budget 2024 Tax Engine  │</a:t>
+              <a:t>│   • Mandate State Machine Engine                       • Finance Act 2024 Tax Engine   │</a:t>
             </a:r>
             <a:br/>
             <a:r>
@@ -6675,7 +6704,7 @@
             </a:r>
             <a:br/>
             <a:r>
-              <a:t>│   • MongoDB Atlas (AWS Mumbai ap-south-1)              • Redis / Cluster SharedState   │</a:t>
+              <a:t>│   • MongoDB Atlas (AWS Mumbai ap-south-1)              • Dedicated SERVER_MASTER_KEY   │</a:t>
             </a:r>
             <a:br/>
             <a:r>
@@ -6799,7 +6828,7 @@
               </a:defRPr>
             </a:pPr>
             <a:r>
-              <a:t>The Problem: The High-Stakes Friction in Indian Wealth Advisory</a:t>
+              <a:t>The Problem: High-Stakes Friction in Indian Wealth Advisory</a:t>
             </a:r>
           </a:p>
           <a:p>
@@ -6812,7 +6841,7 @@
               </a:defRPr>
             </a:pPr>
             <a:r>
-              <a:t>Why legacy approval methods fail both advisory firms and high-net-worth investors.</a:t>
+              <a:t>Why legacy approval channels fail both advisory practices and high-net-worth investors.</a:t>
             </a:r>
           </a:p>
         </p:txBody>
@@ -6907,11 +6936,11 @@
               </a:defRPr>
             </a:pPr>
             <a:r>
-              <a:t>• Advisors routinely collect approvals via WhatsApp, emails, or phone notes.</a:t>
-            </a:r>
-            <a:br/>
-            <a:r>
-              <a:t>• SEBI inspection teams reject informal text messages as non-compliant with Regulation 19.</a:t>
+              <a:t>• Advisers routinely collect approvals via WhatsApp texts, email replies, or unrecorded phone calls.</a:t>
+            </a:r>
+            <a:br/>
+            <a:r>
+              <a:t>• SEBI inspection teams reject informal text messages as non-compliant with Regulation 19 record-keeping rules.</a:t>
             </a:r>
             <a:br/>
             <a:r>
@@ -6919,7 +6948,7 @@
             </a:r>
             <a:br/>
             <a:r>
-              <a:t>• Zero legal admissibility under Section 65B of the Indian Evidence Act.</a:t>
+              <a:t>• Inadmissible under Section 63 BSA / Section 65B without certified cryptographic hash continuity and device provenance.</a:t>
             </a:r>
           </a:p>
         </p:txBody>
@@ -7014,7 +7043,7 @@
               </a:defRPr>
             </a:pPr>
             <a:r>
-              <a:t>• Union Budget 2024 increased STCG to 20% and LTCG to 12.5%.</a:t>
+              <a:t>• Finance Act 2024 revised STCG to 20% and LTCG to 12.5% (+ 4% cess).</a:t>
             </a:r>
             <a:br/>
             <a:r>
@@ -7026,7 +7055,7 @@
             </a:r>
             <a:br/>
             <a:r>
-              <a:t>• Advance tax penal interest (Sections 234B &amp; 234C) erodes investor trust and fee satisfaction.</a:t>
+              <a:t>• Advance tax penal interest (Sections 208, 234B &amp; 234C where liability &gt;= ₹10,000) erodes investor trust and fee satisfaction.</a:t>
             </a:r>
           </a:p>
         </p:txBody>
@@ -7425,7 +7454,7 @@
             </a:r>
             <a:br/>
             <a:r>
-              <a:t>• Expired / Replay Attacks: Opening links past the 48-hour cutoff or after successful consent returns HTTP 410 Expired / Revoked.</a:t>
+              <a:t>• Expired / Replay Attacks: Opening links past the 48-hour cutoff or after successful consent returns HTTP 410 Gone / Revoked.</a:t>
             </a:r>
             <a:br/>
             <a:r>
@@ -8115,7 +8144,7 @@
               </a:defRPr>
             </a:pPr>
             <a:r>
-              <a:t>Compliance with SEBI Cybersecurity Framework and RBI data localization mandates.</a:t>
+              <a:t>Compliance with SEBI Cybersecurity Framework (CSCRF) and DPDP directives.</a:t>
             </a:r>
           </a:p>
         </p:txBody>
@@ -8210,7 +8239,7 @@
               </a:defRPr>
             </a:pPr>
             <a:r>
-              <a:t>• Territorial Data Residency: In strict compliance with SEBI and RBI directives, all primary databases, cryptographic keys, and audit ledgers reside exclusively in AWS Asia Pacific (Mumbai) region (ap-south-1).</a:t>
+              <a:t>• Territorial Data Residency: In strict compliance with SEBI CSCRF and DPDP Act directives, all primary databases, cryptographic keys, and audit ledgers reside exclusively in AWS Asia Pacific (Mumbai) region (ap-south-1).</a:t>
             </a:r>
             <a:br/>
             <a:r>
@@ -8218,11 +8247,15 @@
             </a:r>
             <a:br/>
             <a:r>
-              <a:t>• Orchestration: docker-compose.yml with production environment boundaries and health checks.</a:t>
-            </a:r>
-            <a:br/>
-            <a:r>
-              <a:t>• Zero Third-Party Tracking: Zero external advertising pixels, external analytics beacons, or overseas CDN assets.</a:t>
+              <a:t>• Orchestration &amp; Health: Container architecture with production environment boundaries and automated /api/health checks.</a:t>
+            </a:r>
+            <a:br/>
+            <a:r>
+              <a:t>• Key Isolation: Envelope Server Master Key (SERVER_MASTER_KEY) isolated from application authentication secrets (JWT_SECRET).</a:t>
+            </a:r>
+            <a:br/>
+            <a:r>
+              <a:t>• Zero Third-Party Tracking: Zero external advertising pixels, external analytics beacons, or overseas CDN assets, ensuring complete client privacy.</a:t>
             </a:r>
           </a:p>
         </p:txBody>
@@ -8338,7 +8371,7 @@
               </a:defRPr>
             </a:pPr>
             <a:r>
-              <a:t>Business Value &amp; Measurable Outcomes for Advisory Practices</a:t>
+              <a:t>Business Value &amp; Practice Impact for Advisory Firms</a:t>
             </a:r>
           </a:p>
           <a:p>
@@ -8431,7 +8464,7 @@
               </a:defRPr>
             </a:pPr>
             <a:r>
-              <a:t>100% Audit Readiness</a:t>
+              <a:t>Inspection-Ready Compliance</a:t>
             </a:r>
           </a:p>
           <a:p>
@@ -8446,15 +8479,15 @@
               </a:defRPr>
             </a:pPr>
             <a:r>
-              <a:t>• Pass SEBI regulatory inspections instantly with downloadable Section 65B compliance dossiers.</a:t>
-            </a:r>
-            <a:br/>
-            <a:r>
-              <a:t>• Eliminate 30+ hours of manual audit trail compilation per quarter.</a:t>
-            </a:r>
-            <a:br/>
-            <a:r>
-              <a:t>• Protect RIA license and principal officers from statutory liability.</a:t>
+              <a:t>• Downloadable Section 63 BSA / Section 65B compliance dossiers provide contemporaneous regulatory evidence.</a:t>
+            </a:r>
+            <a:br/>
+            <a:r>
+              <a:t>• Replaces weeks of manual audit trail compilation with instantaneous verification.</a:t>
+            </a:r>
+            <a:br/>
+            <a:r>
+              <a:t>• Safeguards RIA practice and principal officers against claims of unauthorized or discretionary trading.</a:t>
             </a:r>
           </a:p>
         </p:txBody>
@@ -8534,7 +8567,7 @@
               </a:defRPr>
             </a:pPr>
             <a:r>
-              <a:t>Zero Client Tax Shocks</a:t>
+              <a:t>Pre-Trade Tax Transparency</a:t>
             </a:r>
           </a:p>
           <a:p>
@@ -8549,15 +8582,15 @@
               </a:defRPr>
             </a:pPr>
             <a:r>
-              <a:t>• Complete pre-trade capital gains tax visibility builds deep investor trust.</a:t>
-            </a:r>
-            <a:br/>
-            <a:r>
-              <a:t>• Protect clients from quarterly advance tax penalties (Sections 234B &amp; 234C).</a:t>
-            </a:r>
-            <a:br/>
-            <a:r>
-              <a:t>• Elevate advisory relationship from transaction chasing to strategic planning.</a:t>
+              <a:t>• Complete pre-trade capital gains tax visibility eliminates investor surprise.</a:t>
+            </a:r>
+            <a:br/>
+            <a:r>
+              <a:t>• Proactively alerts clients to quarterly advance tax obligations under Section 208 and 234C.</a:t>
+            </a:r>
+            <a:br/>
+            <a:r>
+              <a:t>• Elevates advisory relationship from administrative chasing to high-trust strategic wealth planning.</a:t>
             </a:r>
           </a:p>
         </p:txBody>
@@ -8637,7 +8670,7 @@
               </a:defRPr>
             </a:pPr>
             <a:r>
-              <a:t>75% Faster Authorization</a:t>
+              <a:t>Streamlined Mobile Turnaround</a:t>
             </a:r>
           </a:p>
           <a:p>
@@ -8652,15 +8685,15 @@
               </a:defRPr>
             </a:pPr>
             <a:r>
-              <a:t>• Reduce client consent turnaround from 3–5 days to under 2 hours on mobile.</a:t>
-            </a:r>
-            <a:br/>
-            <a:r>
-              <a:t>• Minimize market slippage during high-volatility rebalancing windows.</a:t>
-            </a:r>
-            <a:br/>
-            <a:r>
-              <a:t>• Seamless 1-click WhatsApp delivery with zero login friction.</a:t>
+              <a:t>• Accelerates client review and consent turnaround to under 2 hours on mobile.</a:t>
+            </a:r>
+            <a:br/>
+            <a:r>
+              <a:t>• Minimizes market slippage during high-volatility rebalancing windows.</a:t>
+            </a:r>
+            <a:br/>
+            <a:r>
+              <a:t>• Secure password-protected magic link delivery without requiring client app installation.</a:t>
             </a:r>
           </a:p>
         </p:txBody>
@@ -8980,7 +9013,7 @@
                         </a:defRPr>
                       </a:pPr>
                       <a:r>
-                        <a:t>Post-trade surprise tax bill; penal interest under Sections 234B/C.</a:t>
+                        <a:t>Post-trade surprise tax bill; penal interest under Sections 208 &amp; 234B/C.</a:t>
                       </a:r>
                     </a:p>
                   </a:txBody>
@@ -8999,7 +9032,7 @@
                         </a:defRPr>
                       </a:pPr>
                       <a:r>
-                        <a:t>Pre-trade Union Budget 2024 calculation with quarterly advance tax alert.</a:t>
+                        <a:t>Pre-trade Finance Act 2024 calculation with quarterly advance tax alert.</a:t>
                       </a:r>
                     </a:p>
                   </a:txBody>
@@ -9098,7 +9131,7 @@
                         </a:defRPr>
                       </a:pPr>
                       <a:r>
-                        <a:t>Scattered screenshots and PDFs; inadmissible under Section 65B.</a:t>
+                        <a:t>Scattered screenshots and PDFs; inadmissible under Section 63 BSA.</a:t>
                       </a:r>
                     </a:p>
                   </a:txBody>
@@ -9117,7 +9150,7 @@
                         </a:defRPr>
                       </a:pPr>
                       <a:r>
-                        <a:t>Append-only forward SHA-256 ledger emitting certified Section 65B compliance dossier.</a:t>
+                        <a:t>Append-only forward SHA-256 ledger emitting certified Section 63 BSA compliance dossier.</a:t>
                       </a:r>
                     </a:p>
                   </a:txBody>
@@ -9223,7 +9256,7 @@
               </a:defRPr>
             </a:pPr>
             <a:r>
-              <a:t>NEXT STEPS</a:t>
+              <a:t>APPENDIX A</a:t>
             </a:r>
           </a:p>
           <a:p>
@@ -9239,7 +9272,7 @@
               </a:defRPr>
             </a:pPr>
             <a:r>
-              <a:t>Conclusion &amp; Next Steps: Deploying FinConsent</a:t>
+              <a:t>Technical Deep-Dive: Cryptographic Invariants &amp; Key Derivation</a:t>
             </a:r>
           </a:p>
           <a:p>
@@ -9252,7 +9285,7 @@
               </a:defRPr>
             </a:pPr>
             <a:r>
-              <a:t>Accelerating advisory compliance, investor trust, and practice scalability.</a:t>
+              <a:t>Formal mathematical specifications for envelope encryption and PBKDF2 KDF.</a:t>
             </a:r>
           </a:p>
         </p:txBody>
@@ -9325,41 +9358,45 @@
           <a:lstStyle/>
           <a:p>
             <a:pPr>
-              <a:defRPr b="1" sz="1400">
+              <a:defRPr b="1" sz="1300">
                 <a:solidFill>
                   <a:srgbClr val="0A192F"/>
                 </a:solidFill>
               </a:defRPr>
             </a:pPr>
             <a:r>
-              <a:t>Implementation &amp; Onboarding Path</a:t>
+              <a:t>Cryptographic Implementation Specifications</a:t>
             </a:r>
           </a:p>
           <a:p>
             <a:pPr>
               <a:spcBef>
-                <a:spcPts val="1000"/>
+                <a:spcPts val="800"/>
               </a:spcBef>
-              <a:defRPr sz="1150">
+              <a:defRPr sz="1100">
                 <a:solidFill>
                   <a:srgbClr val="475569"/>
                 </a:solidFill>
               </a:defRPr>
             </a:pPr>
             <a:r>
-              <a:t>1. Immediate Compliance Upgrade: Onboard RIA practice in under 10 minutes; configure SEBI INA registration number and firm compliance contacts.</a:t>
-            </a:r>
-            <a:br/>
-            <a:r>
-              <a:t>2. Client Roster Migration: Import advisory clients with validated PANs, mobile numbers, and DOB attributes.</a:t>
-            </a:r>
-            <a:br/>
-            <a:r>
-              <a:t>3. Pilot Rebalancing Run: Execute live mandates with select client families to demonstrate pre-trade tax transparency and frictionless mobile OTP consent.</a:t>
-            </a:r>
-            <a:br/>
-            <a:r>
-              <a:t>4. Regulatory Peace of Mind: Rest assured knowing every trade authorization is cryptographically preserved in AWS Mumbai under Section 65B standards.</a:t>
+              <a:t>• Cipher: AES-256-GCM (Galois/Counter Mode) with 12-byte random IV and 16-byte authentication tag.</a:t>
+            </a:r>
+            <a:br/>
+            <a:r>
+              <a:t>• Key Derivation Function: PBKDF2 with SHA-256 digest, 100,000 rounds in production (1,000 in test mode), and 16-byte random salt.</a:t>
+            </a:r>
+            <a:br/>
+            <a:r>
+              <a:t>• Key Derivation Input: Normalized string concatenation of PAN last 4 digits + DOB in DDMMYYYY format.</a:t>
+            </a:r>
+            <a:br/>
+            <a:r>
+              <a:t>• Dual Wrapping: Server DEK wrapped with isolated SERVER_MASTER_KEY; Client DEK wrapped with Client Derived Key.</a:t>
+            </a:r>
+            <a:br/>
+            <a:r>
+              <a:t>• Invariant: Server never stores client plaintext password or unencrypted DEK in database.</a:t>
             </a:r>
           </a:p>
         </p:txBody>
@@ -9373,246 +9410,6 @@
 </file>
 
 <file path=ppt/slides/slide26.xml><?xml version="1.0" encoding="utf-8"?>
-<p:sld xmlns:a="http://schemas.openxmlformats.org/drawingml/2006/main" xmlns:p="http://schemas.openxmlformats.org/presentationml/2006/main" xmlns:r="http://schemas.openxmlformats.org/officeDocument/2006/relationships">
-  <p:cSld>
-    <p:spTree>
-      <p:nvGrpSpPr>
-        <p:cNvPr id="1" name=""/>
-        <p:cNvGrpSpPr/>
-        <p:nvPr/>
-      </p:nvGrpSpPr>
-      <p:grpSpPr/>
-      <p:sp>
-        <p:nvSpPr>
-          <p:cNvPr id="2" name="Rectangle 1"/>
-          <p:cNvSpPr/>
-          <p:nvPr/>
-        </p:nvSpPr>
-        <p:spPr>
-          <a:xfrm>
-            <a:off x="0" y="0"/>
-            <a:ext cx="12191695" cy="6858000"/>
-          </a:xfrm>
-          <a:prstGeom prst="rect">
-            <a:avLst/>
-          </a:prstGeom>
-          <a:solidFill>
-            <a:srgbClr val="FFFFFF"/>
-          </a:solidFill>
-          <a:ln>
-            <a:noFill/>
-          </a:ln>
-        </p:spPr>
-        <p:style>
-          <a:lnRef idx="1">
-            <a:schemeClr val="accent1"/>
-          </a:lnRef>
-          <a:fillRef idx="3">
-            <a:schemeClr val="accent1"/>
-          </a:fillRef>
-          <a:effectRef idx="2">
-            <a:schemeClr val="accent1"/>
-          </a:effectRef>
-          <a:fontRef idx="minor">
-            <a:schemeClr val="lt1"/>
-          </a:fontRef>
-        </p:style>
-        <p:txBody>
-          <a:bodyPr rtlCol="0" anchor="ctr"/>
-          <a:lstStyle/>
-          <a:p>
-            <a:pPr algn="ctr"/>
-          </a:p>
-        </p:txBody>
-      </p:sp>
-      <p:sp>
-        <p:nvSpPr>
-          <p:cNvPr id="3" name="TextBox 2"/>
-          <p:cNvSpPr txBox="1"/>
-          <p:nvPr/>
-        </p:nvSpPr>
-        <p:spPr>
-          <a:xfrm>
-            <a:off x="731520" y="365760"/>
-            <a:ext cx="10728655" cy="1188720"/>
-          </a:xfrm>
-          <a:prstGeom prst="rect">
-            <a:avLst/>
-          </a:prstGeom>
-          <a:noFill/>
-        </p:spPr>
-        <p:txBody>
-          <a:bodyPr wrap="square" lIns="0" tIns="0" rIns="0" bIns="0">
-            <a:spAutoFit/>
-          </a:bodyPr>
-          <a:lstStyle/>
-          <a:p>
-            <a:pPr>
-              <a:spcAft>
-                <a:spcPts val="200"/>
-              </a:spcAft>
-              <a:defRPr sz="950" b="1">
-                <a:solidFill>
-                  <a:srgbClr val="4F46E5"/>
-                </a:solidFill>
-                <a:latin typeface="Calibri"/>
-              </a:defRPr>
-            </a:pPr>
-            <a:r>
-              <a:t>APPENDIX A</a:t>
-            </a:r>
-          </a:p>
-          <a:p>
-            <a:pPr>
-              <a:spcAft>
-                <a:spcPts val="200"/>
-              </a:spcAft>
-              <a:defRPr sz="2200" b="1">
-                <a:solidFill>
-                  <a:srgbClr val="0A192F"/>
-                </a:solidFill>
-                <a:latin typeface="Calibri"/>
-              </a:defRPr>
-            </a:pPr>
-            <a:r>
-              <a:t>Technical Deep-Dive: Cryptographic Invariants &amp; Key Derivation</a:t>
-            </a:r>
-          </a:p>
-          <a:p>
-            <a:pPr>
-              <a:defRPr sz="1200">
-                <a:solidFill>
-                  <a:srgbClr val="475569"/>
-                </a:solidFill>
-                <a:latin typeface="Calibri"/>
-              </a:defRPr>
-            </a:pPr>
-            <a:r>
-              <a:t>Formal mathematical specifications for envelope encryption and PBKDF2 KDF.</a:t>
-            </a:r>
-          </a:p>
-        </p:txBody>
-      </p:sp>
-      <p:sp>
-        <p:nvSpPr>
-          <p:cNvPr id="4" name="Rounded Rectangle 3"/>
-          <p:cNvSpPr/>
-          <p:nvPr/>
-        </p:nvSpPr>
-        <p:spPr>
-          <a:xfrm>
-            <a:off x="731520" y="1828800"/>
-            <a:ext cx="10728655" cy="4206240"/>
-          </a:xfrm>
-          <a:prstGeom prst="roundRect">
-            <a:avLst/>
-          </a:prstGeom>
-          <a:solidFill>
-            <a:srgbClr val="F8FAFC"/>
-          </a:solidFill>
-          <a:ln w="12700">
-            <a:solidFill>
-              <a:srgbClr val="E2E8F0"/>
-            </a:solidFill>
-          </a:ln>
-        </p:spPr>
-        <p:style>
-          <a:lnRef idx="1">
-            <a:schemeClr val="accent1"/>
-          </a:lnRef>
-          <a:fillRef idx="3">
-            <a:schemeClr val="accent1"/>
-          </a:fillRef>
-          <a:effectRef idx="2">
-            <a:schemeClr val="accent1"/>
-          </a:effectRef>
-          <a:fontRef idx="minor">
-            <a:schemeClr val="lt1"/>
-          </a:fontRef>
-        </p:style>
-        <p:txBody>
-          <a:bodyPr rtlCol="0" anchor="ctr"/>
-          <a:lstStyle/>
-          <a:p>
-            <a:pPr algn="ctr"/>
-          </a:p>
-        </p:txBody>
-      </p:sp>
-      <p:sp>
-        <p:nvSpPr>
-          <p:cNvPr id="5" name="TextBox 4"/>
-          <p:cNvSpPr txBox="1"/>
-          <p:nvPr/>
-        </p:nvSpPr>
-        <p:spPr>
-          <a:xfrm>
-            <a:off x="1097280" y="2103120"/>
-            <a:ext cx="10058400" cy="3657600"/>
-          </a:xfrm>
-          <a:prstGeom prst="rect">
-            <a:avLst/>
-          </a:prstGeom>
-          <a:noFill/>
-        </p:spPr>
-        <p:txBody>
-          <a:bodyPr wrap="square">
-            <a:spAutoFit/>
-          </a:bodyPr>
-          <a:lstStyle/>
-          <a:p>
-            <a:pPr>
-              <a:defRPr b="1" sz="1300">
-                <a:solidFill>
-                  <a:srgbClr val="0A192F"/>
-                </a:solidFill>
-              </a:defRPr>
-            </a:pPr>
-            <a:r>
-              <a:t>Cryptographic Implementation Specifications</a:t>
-            </a:r>
-          </a:p>
-          <a:p>
-            <a:pPr>
-              <a:spcBef>
-                <a:spcPts val="800"/>
-              </a:spcBef>
-              <a:defRPr sz="1100">
-                <a:solidFill>
-                  <a:srgbClr val="475569"/>
-                </a:solidFill>
-              </a:defRPr>
-            </a:pPr>
-            <a:r>
-              <a:t>• Cipher: AES-256-GCM (Galois/Counter Mode) with 12-byte random IV and 16-byte authentication tag.</a:t>
-            </a:r>
-            <a:br/>
-            <a:r>
-              <a:t>• Key Derivation Function: PBKDF2 with SHA-256 digest, 100,000 rounds in production (1,000 in test mode), and 16-byte random salt.</a:t>
-            </a:r>
-            <a:br/>
-            <a:r>
-              <a:t>• Key Derivation Input: Normalized string concatenation of PAN last 4 digits + DOB in DDMMYYYY format.</a:t>
-            </a:r>
-            <a:br/>
-            <a:r>
-              <a:t>• Dual Wrapping: Server DEK wrapped with Master Key (JWT_SECRET derived); Client DEK wrapped with Client Derived Key.</a:t>
-            </a:r>
-            <a:br/>
-            <a:r>
-              <a:t>• Invariant: Server never stores client plaintext password or unencrypted DEK in database.</a:t>
-            </a:r>
-          </a:p>
-        </p:txBody>
-      </p:sp>
-    </p:spTree>
-  </p:cSld>
-  <p:clrMapOvr>
-    <a:masterClrMapping/>
-  </p:clrMapOvr>
-</p:sld>
-</file>
-
-<file path=ppt/slides/slide27.xml><?xml version="1.0" encoding="utf-8"?>
 <p:sld xmlns:a="http://schemas.openxmlformats.org/drawingml/2006/main" xmlns:p="http://schemas.openxmlformats.org/presentationml/2006/main" xmlns:r="http://schemas.openxmlformats.org/officeDocument/2006/relationships">
   <p:cSld>
     <p:spTree>
@@ -10253,6 +10050,251 @@
 </p:sld>
 </file>
 
+<file path=ppt/slides/slide27.xml><?xml version="1.0" encoding="utf-8"?>
+<p:sld xmlns:a="http://schemas.openxmlformats.org/drawingml/2006/main" xmlns:p="http://schemas.openxmlformats.org/presentationml/2006/main" xmlns:r="http://schemas.openxmlformats.org/officeDocument/2006/relationships">
+  <p:cSld>
+    <p:spTree>
+      <p:nvGrpSpPr>
+        <p:cNvPr id="1" name=""/>
+        <p:cNvGrpSpPr/>
+        <p:nvPr/>
+      </p:nvGrpSpPr>
+      <p:grpSpPr/>
+      <p:sp>
+        <p:nvSpPr>
+          <p:cNvPr id="2" name="Rectangle 1"/>
+          <p:cNvSpPr/>
+          <p:nvPr/>
+        </p:nvSpPr>
+        <p:spPr>
+          <a:xfrm>
+            <a:off x="0" y="0"/>
+            <a:ext cx="12191695" cy="6858000"/>
+          </a:xfrm>
+          <a:prstGeom prst="rect">
+            <a:avLst/>
+          </a:prstGeom>
+          <a:solidFill>
+            <a:srgbClr val="FFFFFF"/>
+          </a:solidFill>
+          <a:ln>
+            <a:noFill/>
+          </a:ln>
+        </p:spPr>
+        <p:style>
+          <a:lnRef idx="1">
+            <a:schemeClr val="accent1"/>
+          </a:lnRef>
+          <a:fillRef idx="3">
+            <a:schemeClr val="accent1"/>
+          </a:fillRef>
+          <a:effectRef idx="2">
+            <a:schemeClr val="accent1"/>
+          </a:effectRef>
+          <a:fontRef idx="minor">
+            <a:schemeClr val="lt1"/>
+          </a:fontRef>
+        </p:style>
+        <p:txBody>
+          <a:bodyPr rtlCol="0" anchor="ctr"/>
+          <a:lstStyle/>
+          <a:p>
+            <a:pPr algn="ctr"/>
+          </a:p>
+        </p:txBody>
+      </p:sp>
+      <p:sp>
+        <p:nvSpPr>
+          <p:cNvPr id="3" name="TextBox 2"/>
+          <p:cNvSpPr txBox="1"/>
+          <p:nvPr/>
+        </p:nvSpPr>
+        <p:spPr>
+          <a:xfrm>
+            <a:off x="731520" y="365760"/>
+            <a:ext cx="10728655" cy="1188720"/>
+          </a:xfrm>
+          <a:prstGeom prst="rect">
+            <a:avLst/>
+          </a:prstGeom>
+          <a:noFill/>
+        </p:spPr>
+        <p:txBody>
+          <a:bodyPr wrap="square" lIns="0" tIns="0" rIns="0" bIns="0">
+            <a:spAutoFit/>
+          </a:bodyPr>
+          <a:lstStyle/>
+          <a:p>
+            <a:pPr>
+              <a:spcAft>
+                <a:spcPts val="200"/>
+              </a:spcAft>
+              <a:defRPr sz="950" b="1">
+                <a:solidFill>
+                  <a:srgbClr val="4F46E5"/>
+                </a:solidFill>
+                <a:latin typeface="Calibri"/>
+              </a:defRPr>
+            </a:pPr>
+            <a:r>
+              <a:t>APPENDIX C</a:t>
+            </a:r>
+          </a:p>
+          <a:p>
+            <a:pPr>
+              <a:spcAft>
+                <a:spcPts val="200"/>
+              </a:spcAft>
+              <a:defRPr sz="2200" b="1">
+                <a:solidFill>
+                  <a:srgbClr val="0A192F"/>
+                </a:solidFill>
+                <a:latin typeface="Calibri"/>
+              </a:defRPr>
+            </a:pPr>
+            <a:r>
+              <a:t>Technical Deep-Dive: Audit Schema &amp; Section 63 BSA Admissibility</a:t>
+            </a:r>
+          </a:p>
+          <a:p>
+            <a:pPr>
+              <a:defRPr sz="1200">
+                <a:solidFill>
+                  <a:srgbClr val="475569"/>
+                </a:solidFill>
+                <a:latin typeface="Calibri"/>
+              </a:defRPr>
+            </a:pPr>
+            <a:r>
+              <a:t>Evidentiary record structures required by Indian legal standards.</a:t>
+            </a:r>
+          </a:p>
+        </p:txBody>
+      </p:sp>
+      <p:sp>
+        <p:nvSpPr>
+          <p:cNvPr id="4" name="Rounded Rectangle 3"/>
+          <p:cNvSpPr/>
+          <p:nvPr/>
+        </p:nvSpPr>
+        <p:spPr>
+          <a:xfrm>
+            <a:off x="731520" y="1828800"/>
+            <a:ext cx="10728655" cy="4206240"/>
+          </a:xfrm>
+          <a:prstGeom prst="roundRect">
+            <a:avLst/>
+          </a:prstGeom>
+          <a:solidFill>
+            <a:srgbClr val="F8FAFC"/>
+          </a:solidFill>
+          <a:ln w="12700">
+            <a:solidFill>
+              <a:srgbClr val="E2E8F0"/>
+            </a:solidFill>
+          </a:ln>
+        </p:spPr>
+        <p:style>
+          <a:lnRef idx="1">
+            <a:schemeClr val="accent1"/>
+          </a:lnRef>
+          <a:fillRef idx="3">
+            <a:schemeClr val="accent1"/>
+          </a:fillRef>
+          <a:effectRef idx="2">
+            <a:schemeClr val="accent1"/>
+          </a:effectRef>
+          <a:fontRef idx="minor">
+            <a:schemeClr val="lt1"/>
+          </a:fontRef>
+        </p:style>
+        <p:txBody>
+          <a:bodyPr rtlCol="0" anchor="ctr"/>
+          <a:lstStyle/>
+          <a:p>
+            <a:pPr algn="ctr"/>
+          </a:p>
+        </p:txBody>
+      </p:sp>
+      <p:sp>
+        <p:nvSpPr>
+          <p:cNvPr id="5" name="TextBox 4"/>
+          <p:cNvSpPr txBox="1"/>
+          <p:nvPr/>
+        </p:nvSpPr>
+        <p:spPr>
+          <a:xfrm>
+            <a:off x="1097280" y="2103120"/>
+            <a:ext cx="10058400" cy="3657600"/>
+          </a:xfrm>
+          <a:prstGeom prst="rect">
+            <a:avLst/>
+          </a:prstGeom>
+          <a:noFill/>
+        </p:spPr>
+        <p:txBody>
+          <a:bodyPr wrap="square">
+            <a:spAutoFit/>
+          </a:bodyPr>
+          <a:lstStyle/>
+          <a:p>
+            <a:pPr>
+              <a:defRPr b="1" sz="1300">
+                <a:solidFill>
+                  <a:srgbClr val="0A192F"/>
+                </a:solidFill>
+              </a:defRPr>
+            </a:pPr>
+            <a:r>
+              <a:t>Section 63 BSA Electronic Evidence Mandatory Attributes</a:t>
+            </a:r>
+          </a:p>
+          <a:p>
+            <a:pPr>
+              <a:spcBef>
+                <a:spcPts val="800"/>
+              </a:spcBef>
+              <a:defRPr sz="1100">
+                <a:solidFill>
+                  <a:srgbClr val="475569"/>
+                </a:solidFill>
+              </a:defRPr>
+            </a:pPr>
+            <a:r>
+              <a:t>Under Section 63 of Bharatiya Sakshya Adhiniyam, 2023 (BSA) and Section 65B of erstwhile Indian Evidence Act, secondary electronic records require:</a:t>
+            </a:r>
+            <a:br/>
+            <a:br/>
+            <a:r>
+              <a:t>1. Origin Identification: Client IP Address (RFC 5737 203.0.113.12) and browser User-Agent recorded at execution time.</a:t>
+            </a:r>
+            <a:br/>
+            <a:r>
+              <a:t>2. Synchronized Timestamp: Server-side NTP timestamping localized to Indian Standard Time (IST).</a:t>
+            </a:r>
+            <a:br/>
+            <a:r>
+              <a:t>3. Hash Integrity Seal: SHA-256 payloadHash computed over the immutable consent certificate.</a:t>
+            </a:r>
+            <a:br/>
+            <a:r>
+              <a:t>4. Device Custody Proof: Evidence that the computer system was operating properly during record generation.</a:t>
+            </a:r>
+            <a:br/>
+            <a:r>
+              <a:t>5. Regulation 19 Admissibility: Cryptographically chained forward hashes guarantee zero retroactive modifications.</a:t>
+            </a:r>
+          </a:p>
+        </p:txBody>
+      </p:sp>
+    </p:spTree>
+  </p:cSld>
+  <p:clrMapOvr>
+    <a:masterClrMapping/>
+  </p:clrMapOvr>
+</p:sld>
+</file>
+
 <file path=ppt/slides/slide28.xml><?xml version="1.0" encoding="utf-8"?>
 <p:sld xmlns:a="http://schemas.openxmlformats.org/drawingml/2006/main" xmlns:p="http://schemas.openxmlformats.org/presentationml/2006/main" xmlns:r="http://schemas.openxmlformats.org/officeDocument/2006/relationships">
   <p:cSld>
@@ -10340,7 +10382,7 @@
               </a:defRPr>
             </a:pPr>
             <a:r>
-              <a:t>APPENDIX C</a:t>
+              <a:t>APPENDIX D</a:t>
             </a:r>
           </a:p>
           <a:p>
@@ -10356,7 +10398,7 @@
               </a:defRPr>
             </a:pPr>
             <a:r>
-              <a:t>Technical Deep-Dive: Audit Schema &amp; Section 65B Admissibility</a:t>
+              <a:t>Operational Considerations: Implemented State vs. Roadmap</a:t>
             </a:r>
           </a:p>
           <a:p>
@@ -10369,7 +10411,7 @@
               </a:defRPr>
             </a:pPr>
             <a:r>
-              <a:t>Evidentiary record structures required by Indian legal standards.</a:t>
+              <a:t>Clear demarcation between current production capabilities and future roadmap milestones.</a:t>
             </a:r>
           </a:p>
         </p:txBody>
@@ -10383,7 +10425,7 @@
         <p:spPr>
           <a:xfrm>
             <a:off x="731520" y="1828800"/>
-            <a:ext cx="10728655" cy="4206240"/>
+            <a:ext cx="5120640" cy="4206240"/>
           </a:xfrm>
           <a:prstGeom prst="roundRect">
             <a:avLst/>
@@ -10427,8 +10469,8 @@
         </p:nvSpPr>
         <p:spPr>
           <a:xfrm>
-            <a:off x="1097280" y="2103120"/>
-            <a:ext cx="10058400" cy="3657600"/>
+            <a:off x="914400" y="2011680"/>
+            <a:ext cx="4754880" cy="3840480"/>
           </a:xfrm>
           <a:prstGeom prst="rect">
             <a:avLst/>
@@ -10444,12 +10486,12 @@
             <a:pPr>
               <a:defRPr b="1" sz="1300">
                 <a:solidFill>
-                  <a:srgbClr val="0A192F"/>
-                </a:solidFill>
-              </a:defRPr>
-            </a:pPr>
-            <a:r>
-              <a:t>Section 65B Electronic Evidence Mandatory Attributes</a:t>
+                  <a:srgbClr val="059669"/>
+                </a:solidFill>
+              </a:defRPr>
+            </a:pPr>
+            <a:r>
+              <a:t>Implemented Production Capabilities</a:t>
             </a:r>
           </a:p>
           <a:p>
@@ -10457,35 +10499,149 @@
               <a:spcBef>
                 <a:spcPts val="800"/>
               </a:spcBef>
-              <a:defRPr sz="1100">
+              <a:defRPr sz="1050">
                 <a:solidFill>
                   <a:srgbClr val="475569"/>
                 </a:solidFill>
               </a:defRPr>
             </a:pPr>
             <a:r>
-              <a:t>Under the Indian Evidence Act, 1872 and Information Technology Act, 2000, secondary electronic records require:</a:t>
-            </a:r>
-            <a:br/>
-            <a:br/>
-            <a:r>
-              <a:t>1. Origin Identification: Client IP Address (e.g. 49.36.110.12) and browser User-Agent recorded at execution time.</a:t>
-            </a:r>
-            <a:br/>
-            <a:r>
-              <a:t>2. Synchronized Timestamp: Server-side NTP timestamping localized to Indian Standard Time (IST).</a:t>
-            </a:r>
-            <a:br/>
-            <a:r>
-              <a:t>3. Hash Integrity Seal: SHA-256 payloadHash computed over the immutable consent certificate.</a:t>
-            </a:r>
-            <a:br/>
-            <a:r>
-              <a:t>4. Device Custody Proof: Evidence that the computer system was operating properly during the record generation.</a:t>
-            </a:r>
-            <a:br/>
-            <a:r>
-              <a:t>5. Regulation 19 Admissibility: Cryptographically chained forward hashes guarantee zero retroactive modifications.</a:t>
+              <a:t>• Full non-discretionary mandate formulation &amp; tax engine.</a:t>
+            </a:r>
+            <a:br/>
+            <a:r>
+              <a:t>• AES-256-GCM dual-envelope encryption &amp; PBKDF2 password gate.</a:t>
+            </a:r>
+            <a:br/>
+            <a:r>
+              <a:t>• 256-bit magic links with SHA-256 database hashing &amp; 48h cutoff.</a:t>
+            </a:r>
+            <a:br/>
+            <a:r>
+              <a:t>• In-app mandate chat with explicit non-consent separation.</a:t>
+            </a:r>
+            <a:br/>
+            <a:r>
+              <a:t>• Section 63 BSA electronic compliance receipts with SHA-256 hash chaining.</a:t>
+            </a:r>
+            <a:br/>
+            <a:r>
+              <a:t>• Multi-tenant isolation, RBAC, staff TOTP MFA, and distributed rate limiting.</a:t>
+            </a:r>
+            <a:br/>
+            <a:r>
+              <a:t>• 8 supported languages with English ASCII numerals.</a:t>
+            </a:r>
+          </a:p>
+        </p:txBody>
+      </p:sp>
+      <p:sp>
+        <p:nvSpPr>
+          <p:cNvPr id="6" name="Rounded Rectangle 5"/>
+          <p:cNvSpPr/>
+          <p:nvPr/>
+        </p:nvSpPr>
+        <p:spPr>
+          <a:xfrm>
+            <a:off x="6217920" y="1828800"/>
+            <a:ext cx="5242255" cy="4206240"/>
+          </a:xfrm>
+          <a:prstGeom prst="roundRect">
+            <a:avLst/>
+          </a:prstGeom>
+          <a:solidFill>
+            <a:srgbClr val="F8FAFC"/>
+          </a:solidFill>
+          <a:ln w="12700">
+            <a:solidFill>
+              <a:srgbClr val="E2E8F0"/>
+            </a:solidFill>
+          </a:ln>
+        </p:spPr>
+        <p:style>
+          <a:lnRef idx="1">
+            <a:schemeClr val="accent1"/>
+          </a:lnRef>
+          <a:fillRef idx="3">
+            <a:schemeClr val="accent1"/>
+          </a:fillRef>
+          <a:effectRef idx="2">
+            <a:schemeClr val="accent1"/>
+          </a:effectRef>
+          <a:fontRef idx="minor">
+            <a:schemeClr val="lt1"/>
+          </a:fontRef>
+        </p:style>
+        <p:txBody>
+          <a:bodyPr rtlCol="0" anchor="ctr"/>
+          <a:lstStyle/>
+          <a:p>
+            <a:pPr algn="ctr"/>
+          </a:p>
+        </p:txBody>
+      </p:sp>
+      <p:sp>
+        <p:nvSpPr>
+          <p:cNvPr id="7" name="TextBox 6"/>
+          <p:cNvSpPr txBox="1"/>
+          <p:nvPr/>
+        </p:nvSpPr>
+        <p:spPr>
+          <a:xfrm>
+            <a:off x="6492240" y="2011680"/>
+            <a:ext cx="4693615" cy="3840480"/>
+          </a:xfrm>
+          <a:prstGeom prst="rect">
+            <a:avLst/>
+          </a:prstGeom>
+          <a:noFill/>
+        </p:spPr>
+        <p:txBody>
+          <a:bodyPr wrap="square">
+            <a:spAutoFit/>
+          </a:bodyPr>
+          <a:lstStyle/>
+          <a:p>
+            <a:pPr>
+              <a:defRPr b="1" sz="1300">
+                <a:solidFill>
+                  <a:srgbClr val="4F46E5"/>
+                </a:solidFill>
+              </a:defRPr>
+            </a:pPr>
+            <a:r>
+              <a:t>Documented Scope &amp; Future Roadmap</a:t>
+            </a:r>
+          </a:p>
+          <a:p>
+            <a:pPr>
+              <a:spcBef>
+                <a:spcPts val="800"/>
+              </a:spcBef>
+              <a:defRPr sz="1050">
+                <a:solidFill>
+                  <a:srgbClr val="475569"/>
+                </a:solidFill>
+              </a:defRPr>
+            </a:pPr>
+            <a:r>
+              <a:t>• Production TRAI DLT SMS Gateway: Current setup delivers OTP via email and in-app display (SMS disabled by policy); commercial SMS requires onboarding a TRAI DLT-registered aggregator.</a:t>
+            </a:r>
+            <a:br/>
+            <a:r>
+              <a:t>• WhatsApp Channel Delivery: Currently dispatched via secure email magic links; direct WhatsApp Business API delivery is on the product roadmap.</a:t>
+            </a:r>
+            <a:br/>
+            <a:r>
+              <a:t>• CloudHSM Key Management: Envelope Server Master Key isolated via environment config; AWS CloudHSM or KMS recommended for institutional banking tiers.</a:t>
+            </a:r>
+            <a:br/>
+            <a:r>
+              <a:t>• Direct Broker Execution: FinConsent intentionally halts at locked statutory consent; execution is handled by client/broker terminal (API execution on roadmap).</a:t>
+            </a:r>
+            <a:br/>
+            <a:r>
+              <a:t>• External RFC 3161 Time Stamping: Anchoring ledger roots to an external Time Stamping Authority (TSA).</a:t>
             </a:r>
           </a:p>
         </p:txBody>
@@ -10585,7 +10741,7 @@
               </a:defRPr>
             </a:pPr>
             <a:r>
-              <a:t>APPENDIX D</a:t>
+              <a:t>PILOT PROPOSAL &amp; NEXT STEPS</a:t>
             </a:r>
           </a:p>
           <a:p>
@@ -10601,7 +10757,7 @@
               </a:defRPr>
             </a:pPr>
             <a:r>
-              <a:t>Operational Considerations &amp; Future Recommendations</a:t>
+              <a:t>Institutional Pilot Proposal &amp; Implementation Roadmap</a:t>
             </a:r>
           </a:p>
           <a:p>
@@ -10614,7 +10770,7 @@
               </a:defRPr>
             </a:pPr>
             <a:r>
-              <a:t>Clear demarcation between current implemented state and future roadmap.</a:t>
+              <a:t>Structured 4-week pilot deployment for fee-only advisory practices with verified commercial terms.</a:t>
             </a:r>
           </a:p>
         </p:txBody>
@@ -10689,12 +10845,12 @@
             <a:pPr>
               <a:defRPr b="1" sz="1300">
                 <a:solidFill>
-                  <a:srgbClr val="059669"/>
-                </a:solidFill>
-              </a:defRPr>
-            </a:pPr>
-            <a:r>
-              <a:t>Implemented Production Capabilities</a:t>
+                  <a:srgbClr val="0A192F"/>
+                </a:solidFill>
+              </a:defRPr>
+            </a:pPr>
+            <a:r>
+              <a:t>4-Week Phased Implementation Roadmap</a:t>
             </a:r>
           </a:p>
           <a:p>
@@ -10709,31 +10865,38 @@
               </a:defRPr>
             </a:pPr>
             <a:r>
-              <a:t>• Full non-discretionary mandate formulation &amp; tax engine.</a:t>
-            </a:r>
-            <a:br/>
-            <a:r>
-              <a:t>• AES-256-GCM dual-envelope encryption &amp; PBKDF2 password gate.</a:t>
-            </a:r>
-            <a:br/>
-            <a:r>
-              <a:t>• 256-bit magic links with SHA-256 database hashing &amp; 48h cutoff.</a:t>
-            </a:r>
-            <a:br/>
-            <a:r>
-              <a:t>• In-app mandate chat with explicit non-consent separation.</a:t>
-            </a:r>
-            <a:br/>
-            <a:r>
-              <a:t>• Section 65B electronic compliance receipts with SHA-256 hash chaining.</a:t>
-            </a:r>
-            <a:br/>
-            <a:r>
-              <a:t>• Multi-tenant isolation, RBAC, TOTP MFA, and distributed rate limiting.</a:t>
-            </a:r>
-            <a:br/>
-            <a:r>
-              <a:t>• 8 Indian languages localization with English numerals.</a:t>
+              <a:t>• Week 1: Practice Setup &amp; Governance Configuration</a:t>
+            </a:r>
+            <a:br/>
+            <a:r>
+              <a:t>  Configure SEBI INA registration number (e.g. INA000088921), firm compliance contacts, and staff TOTP MFA.</a:t>
+            </a:r>
+            <a:br/>
+            <a:br/>
+            <a:r>
+              <a:t>• Week 2: Client Roster Ingestion &amp; Masked Verification</a:t>
+            </a:r>
+            <a:br/>
+            <a:r>
+              <a:t>  Import advisory client profiles with validated PAN syntax (XXXXX1234F), DOB attributes, and configure practice rebalancing templates.</a:t>
+            </a:r>
+            <a:br/>
+            <a:br/>
+            <a:r>
+              <a:t>• Week 3: Controlled Pilot Rebalancing Run</a:t>
+            </a:r>
+            <a:br/>
+            <a:r>
+              <a:t>  Execute live mandates with 10–25 client families; demonstrate pre-trade tax visibility and frictionless mobile OTP consent.</a:t>
+            </a:r>
+            <a:br/>
+            <a:br/>
+            <a:r>
+              <a:t>• Week 4: Compliance Officer Review &amp; Production Rollout</a:t>
+            </a:r>
+            <a:br/>
+            <a:r>
+              <a:t>  Audit Section 63 BSA compliance receipts with firm Compliance Officer; transition full practice to automated FinConsent workflows.</a:t>
             </a:r>
           </a:p>
         </p:txBody>
@@ -10813,7 +10976,7 @@
               </a:defRPr>
             </a:pPr>
             <a:r>
-              <a:t>Future Recommendations / Roadmap</a:t>
+              <a:t>Verified Commercial Terms &amp; Pilot Inquiries</a:t>
             </a:r>
           </a:p>
           <a:p>
@@ -10828,19 +10991,34 @@
               </a:defRPr>
             </a:pPr>
             <a:r>
-              <a:t>• Production TRAI DLT SMS Gateway: Current setup disables SMS by policy (using email/in-app). Commercial rollout requires onboarding a DLT-registered SMS provider (Twilio/Gupshup).</a:t>
-            </a:r>
-            <a:br/>
-            <a:r>
-              <a:t>• CloudHSM Key Management: Derives Server Master Key from JWT_SECRET; AWS CloudHSM or KMS recommended for institutional banking.</a:t>
-            </a:r>
-            <a:br/>
-            <a:r>
-              <a:t>• Automated Broker API Execution: Halts at locked Section 65B consent dossiers; direct broker execution (Kite/SmartAPI) planned for future phase.</a:t>
-            </a:r>
-            <a:br/>
-            <a:r>
-              <a:t>• External RFC 3161 Time Stamping: Anchoring ledger roots to an external Time Stamping Authority (TSA).</a:t>
+              <a:t>• Verified Pro Practice Tier: ₹2,499 / month (+ 18% GST statutory cess)</a:t>
+            </a:r>
+            <a:br/>
+            <a:r>
+              <a:t>  Includes up to 100 active mandates/month, unlimited client roster, complete tax engine, and statutory 5-year cryptographic audit ledger retention.</a:t>
+            </a:r>
+            <a:br/>
+            <a:br/>
+            <a:r>
+              <a:t>• Zero Execution Surcharges: FinConsent charges no basis points (bps) or AUM percentages.</a:t>
+            </a:r>
+            <a:br/>
+            <a:br/>
+            <a:r>
+              <a:t>• Synthetic Demonstration Data: All demonstration credentials and client examples are synthetic.</a:t>
+            </a:r>
+            <a:br/>
+            <a:br/>
+            <a:r>
+              <a:t>• Practice Inquiries &amp; Pilot Onboarding:</a:t>
+            </a:r>
+            <a:br/>
+            <a:r>
+              <a:t>  Official Inquiries: compliance@finconsent.in</a:t>
+            </a:r>
+            <a:br/>
+            <a:r>
+              <a:t>  Demonstration Workspace: Prudent Wealth Advisory (SEBI Reg: INA000088921)</a:t>
             </a:r>
           </a:p>
         </p:txBody>
@@ -11064,12 +11242,12 @@
               </a:defRPr>
             </a:pPr>
             <a:r>
-              <a:t>Principal Officer &amp; Founder, Prudent Wealth Advisory (SEBI Reg: INA000018421)</a:t>
-            </a:r>
-          </a:p>
-          <a:p>
-            <a:pPr>
-              <a:defRPr sz="1150">
+              <a:t>Principal Officer &amp; Founder, Prudent Wealth Advisory (SEBI Reg: INA000088921)</a:t>
+            </a:r>
+          </a:p>
+          <a:p>
+            <a:pPr>
+              <a:defRPr sz="1100">
                 <a:solidFill>
                   <a:srgbClr val="475569"/>
                 </a:solidFill>
@@ -11084,7 +11262,15 @@
             </a:r>
             <a:br/>
             <a:r>
-              <a:t>• Regulatory Obligation: Must recommend selling equities and buying debt/gold, but cannot execute without prior written consent and full tax disclosure under SEBI Regulation 19.</a:t>
+              <a:t>• Regulatory Obligation: Must recommend selling equities and buying debt and gold ETF, but cannot execute without prior written consent, documented rationale, and 5-year record-keeping under SEBI Regulation 19.</a:t>
+            </a:r>
+            <a:br/>
+            <a:r>
+              <a:t>• Execution Boundary: FinConsent records consent and maintains audit evidence; trade execution is executed separately via client's broker.</a:t>
+            </a:r>
+            <a:br/>
+            <a:r>
+              <a:t>• Note: Illustrative persona for workflow demonstration.</a:t>
             </a:r>
           </a:p>
         </p:txBody>
@@ -11179,12 +11365,12 @@
               </a:defRPr>
             </a:pPr>
             <a:r>
-              <a:t>HNI Advisory Client | Managing Director, Auto-Tech Firm, Pune (PAN: ABCDE1234F)</a:t>
-            </a:r>
-          </a:p>
-          <a:p>
-            <a:pPr>
-              <a:defRPr sz="1150">
+              <a:t>HNI Advisory Client | Managing Director, Auto-Tech Firm, Pune (Masked PAN: XXXXX1234F)</a:t>
+            </a:r>
+          </a:p>
+          <a:p>
+            <a:pPr>
+              <a:defRPr sz="1100">
                 <a:solidFill>
                   <a:srgbClr val="475569"/>
                 </a:solidFill>
@@ -11200,6 +11386,14 @@
             <a:br/>
             <a:r>
               <a:t>• Need: Demands a frictionless 2-minute mobile authorization flow that clearly explains why securities are being sold and the exact rupee tax liability.</a:t>
+            </a:r>
+            <a:br/>
+            <a:r>
+              <a:t>• Security: Accesses proposal securely via PAN-last-4 + DOB convenience verification PIN defended online by strict rate limiting.</a:t>
+            </a:r>
+            <a:br/>
+            <a:r>
+              <a:t>• Note: Illustrative persona with synthetic credentials.</a:t>
             </a:r>
           </a:p>
         </p:txBody>
@@ -11451,7 +11645,7 @@
               </a:defRPr>
             </a:pPr>
             <a:r>
-              <a:t>SEBI Regulation 19 Violation</a:t>
+              <a:t>SEBI Regulation 19 Compliance Exposure</a:t>
             </a:r>
           </a:p>
           <a:p>
@@ -11463,7 +11657,7 @@
               </a:defRPr>
             </a:pPr>
             <a:r>
-              <a:t>Advisers without cryptographic client consent face cancellation of registration, show-cause notices, and personal penalties during mandatory regulatory inspections.</a:t>
+              <a:t>Failing to maintain contemporaneous records of investment advice, rationale, and documented client agreement for 5 years leaves advisers vulnerable during mandatory SEBI inspections and dispute resolutions.</a:t>
             </a:r>
           </a:p>
         </p:txBody>
@@ -11586,7 +11780,7 @@
               </a:defRPr>
             </a:pPr>
             <a:r>
-              <a:t>Advance Tax Penalties (Sec 234B &amp; 234C)</a:t>
+              <a:t>Advance Tax Penalties (Sec 208, 234B &amp; 234C)</a:t>
             </a:r>
           </a:p>
           <a:p>
@@ -11598,7 +11792,7 @@
               </a:defRPr>
             </a:pPr>
             <a:r>
-              <a:t>Selling equities without advance tax warnings leads to mandatory 1% monthly penal interest, creating direct client friction and fee dissatisfaction.</a:t>
+              <a:t>Selling equities without advance tax warnings risks 1% monthly penal interest if net tax liability reaches ₹10,000; requires planning under Section 234C capital gains installment relief proviso.</a:t>
             </a:r>
           </a:p>
         </p:txBody>
@@ -11721,7 +11915,7 @@
               </a:defRPr>
             </a:pPr>
             <a:r>
-              <a:t>Inadmissible Electronic Evidence</a:t>
+              <a:t>Electronic Evidence Inadmissibility (BSA Sec 63 / Sec 65B)</a:t>
             </a:r>
           </a:p>
           <a:p>
@@ -11733,7 +11927,7 @@
               </a:defRPr>
             </a:pPr>
             <a:r>
-              <a:t>Under Section 65B of the Indian Evidence Act, raw screenshots of WhatsApp messages cannot be admitted into court or arbitration tribunals without device and server hash proof.</a:t>
+              <a:t>Under Section 63 of Bharatiya Sakshya Adhiniyam, 2023 (and erstwhile Section 65B), raw screenshots lack server hash continuity and device provenance required for court or tribunal admissibility.</a:t>
             </a:r>
           </a:p>
         </p:txBody>
@@ -12135,7 +12329,7 @@
               </a:defRPr>
             </a:pPr>
             <a:r>
-              <a:t>Dynamic Union Budget 2024 tax engine. Computes STCG (20%) and LTCG (12.5%) in real time, alerting clients to quarterly advance tax deadlines.</a:t>
+              <a:t>Dynamic Finance Act 2024 tax engine. Computes STCG (20%) and LTCG (12.5% + 4% cess) in real time, alerting clients to quarterly advance tax deadlines.</a:t>
             </a:r>
           </a:p>
         </p:txBody>
@@ -12273,7 +12467,7 @@
               </a:defRPr>
             </a:pPr>
             <a:r>
-              <a:t>AES-256-GCM encryption with dual key wrapping. Protects sensitive financial assets until client unlocks via PAN last 4 digits and DOB.</a:t>
+              <a:t>AES-256-GCM encryption with dual key wrapping and isolated server master key. Protects sensitive financial assets until client unlocks via PAN last 4 digits and DOB.</a:t>
             </a:r>
           </a:p>
         </p:txBody>
@@ -12396,7 +12590,7 @@
               </a:defRPr>
             </a:pPr>
             <a:r>
-              <a:t>3. Frictionless Mobile Consent</a:t>
+              <a:t>3. Secure Mobile Consent Rail</a:t>
             </a:r>
           </a:p>
           <a:p>
@@ -12411,7 +12605,7 @@
               </a:defRPr>
             </a:pPr>
             <a:r>
-              <a:t>Zero-login 256-bit magic links. 360px responsive mobile layout, mandate clarification chat, and TRAI DLT 6-digit OTP verification.</a:t>
+              <a:t>Direct password-protected 256-bit magic links. 360px responsive mobile layout, mandate clarification chat, and secure email/in-app 6-digit OTP verification.</a:t>
             </a:r>
           </a:p>
         </p:txBody>
@@ -12534,7 +12728,7 @@
               </a:defRPr>
             </a:pPr>
             <a:r>
-              <a:t>4. Section 65B Audit Trail</a:t>
+              <a:t>4. Section 63 BSA Audit Ledger</a:t>
             </a:r>
           </a:p>
           <a:p>
@@ -12788,7 +12982,7 @@
               </a:defRPr>
             </a:pPr>
             <a:r>
-              <a:t>Suresh detects 15% equity drift. Drafts ₹11.10L rebalance into corporate debt and gold bonds.</a:t>
+              <a:t>Suresh detects 15% equity drift. Drafts ₹11.10L rebalance into corporate debt ETF and Gold ETF (secondary market).</a:t>
             </a:r>
           </a:p>
           <a:p>
@@ -12910,7 +13104,7 @@
               </a:defRPr>
             </a:pPr>
             <a:r>
-              <a:t>Engine calculates ₹11,440 capital gains tax. Generates 48-hour cutoff window and dispatch link.</a:t>
+              <a:t>Engine calculates ₹11,440 capital gains tax estimate. Generates 48-hour cutoff window and dispatch magic link.</a:t>
             </a:r>
           </a:p>
           <a:p>
@@ -13032,7 +13226,7 @@
               </a:defRPr>
             </a:pPr>
             <a:r>
-              <a:t>Delivered via WhatsApp. Rohan opens link; sensitive data remains encrypted until PAN+DOB unlock.</a:t>
+              <a:t>Delivered via email magic link (WhatsApp on roadmap). Rohan opens link; sensitive data remains encrypted until PAN+DOB unlock.</a:t>
             </a:r>
           </a:p>
           <a:p>
@@ -13154,7 +13348,7 @@
               </a:defRPr>
             </a:pPr>
             <a:r>
-              <a:t>Rohan reviews trade baskets, asks a clarification in mandate chat. Suresh replies; Rohan accepts terms.</a:t>
+              <a:t>Rohan reviews trade baskets, asks a clarification in mandate chat. Suresh replies; Rohan accepts terms (Chat != Consent).</a:t>
             </a:r>
           </a:p>
           <a:p>
@@ -13276,7 +13470,7 @@
               </a:defRPr>
             </a:pPr>
             <a:r>
-              <a:t>Rohan verifies 6-digit OTP. Token revoked; Section 65B compliance dossier locked immutably.</a:t>
+              <a:t>Rohan verifies 6-digit OTP. Token burned; Section 63 BSA compliance dossier locked immutably (trade execution by broker/client).</a:t>
             </a:r>
           </a:p>
           <a:p>
@@ -13422,51 +13616,30 @@
           </a:p>
         </p:txBody>
       </p:sp>
-      <p:sp>
-        <p:nvSpPr>
-          <p:cNvPr id="4" name="Rounded Rectangle 3"/>
-          <p:cNvSpPr/>
-          <p:nvPr/>
-        </p:nvSpPr>
-        <p:spPr>
-          <a:xfrm>
-            <a:off x="731520" y="1828800"/>
-            <a:ext cx="10728655" cy="4389120"/>
-          </a:xfrm>
-          <a:prstGeom prst="roundRect">
-            <a:avLst/>
-          </a:prstGeom>
-          <a:solidFill>
-            <a:srgbClr val="F8FAFC"/>
-          </a:solidFill>
-          <a:ln w="12700">
-            <a:solidFill>
-              <a:srgbClr val="E2E8F0"/>
-            </a:solidFill>
-          </a:ln>
-        </p:spPr>
-        <p:style>
-          <a:lnRef idx="1">
-            <a:schemeClr val="accent1"/>
-          </a:lnRef>
-          <a:fillRef idx="3">
-            <a:schemeClr val="accent1"/>
-          </a:fillRef>
-          <a:effectRef idx="2">
-            <a:schemeClr val="accent1"/>
-          </a:effectRef>
-          <a:fontRef idx="minor">
-            <a:schemeClr val="lt1"/>
-          </a:fontRef>
-        </p:style>
-        <p:txBody>
-          <a:bodyPr rtlCol="0" anchor="ctr"/>
-          <a:lstStyle/>
-          <a:p>
-            <a:pPr algn="ctr"/>
-          </a:p>
-        </p:txBody>
-      </p:sp>
+      <p:pic>
+        <p:nvPicPr>
+          <p:cNvPr id="4" name="Picture 3" descr="process-flow.png"/>
+          <p:cNvPicPr>
+            <a:picLocks noChangeAspect="1"/>
+          </p:cNvPicPr>
+          <p:nvPr/>
+        </p:nvPicPr>
+        <p:blipFill>
+          <a:blip r:embed="rId2"/>
+          <a:stretch>
+            <a:fillRect/>
+          </a:stretch>
+        </p:blipFill>
+        <p:spPr>
+          <a:xfrm>
+            <a:off x="731520" y="1645920"/>
+            <a:ext cx="10728655" cy="4663440"/>
+          </a:xfrm>
+          <a:prstGeom prst="rect">
+            <a:avLst/>
+          </a:prstGeom>
+        </p:spPr>
+      </p:pic>
       <p:sp>
         <p:nvSpPr>
           <p:cNvPr id="5" name="TextBox 4"/>
@@ -13475,8 +13648,8 @@
         </p:nvSpPr>
         <p:spPr>
           <a:xfrm>
-            <a:off x="1005840" y="2103120"/>
-            <a:ext cx="10180015" cy="3840480"/>
+            <a:off x="731520" y="6382512"/>
+            <a:ext cx="10728655" cy="365760"/>
           </a:xfrm>
           <a:prstGeom prst="rect">
             <a:avLst/>
@@ -13484,169 +13657,21 @@
           <a:noFill/>
         </p:spPr>
         <p:txBody>
-          <a:bodyPr wrap="square">
+          <a:bodyPr wrap="square" lIns="0" tIns="0" rIns="0" bIns="0">
             <a:spAutoFit/>
           </a:bodyPr>
           <a:lstStyle/>
           <a:p>
             <a:pPr>
-              <a:defRPr sz="850">
-                <a:solidFill>
-                  <a:srgbClr val="0A192F"/>
-                </a:solidFill>
-                <a:latin typeface="Consolas"/>
-              </a:defRPr>
-            </a:pPr>
-            <a:r>
-              <a:t>[ 1. RIA FORMULATION ]</a:t>
-            </a:r>
-            <a:br/>
-            <a:r>
-              <a:t>   • Portfolio Drift Identified (Equity 65% → 50% target)</a:t>
-            </a:r>
-            <a:br/>
-            <a:r>
-              <a:t>   • Trade baskets constructed (Sell HDFC Bank &amp; Tata Motors; Buy Bharat Bond ETF &amp; SGB)</a:t>
-            </a:r>
-            <a:br/>
-            <a:r>
-              <a:t>   • Advisory Rationale documented under SEBI IA Regulations</a:t>
-            </a:r>
-            <a:br/>
-            <a:r>
-              <a:t>              │</a:t>
-            </a:r>
-            <a:br/>
-            <a:r>
-              <a:t>              ▼</a:t>
-            </a:r>
-            <a:br/>
-            <a:r>
-              <a:t>[ 2. TAX-IMPACT CALCULATION &amp; 48H CUTOFF ]</a:t>
-            </a:r>
-            <a:br/>
-            <a:r>
-              <a:t>   • Union Budget 2024 Engine: STCG @ 20% (₹11,000) + LTCG @ 12.5% (Exempt) + 4% Cess</a:t>
-            </a:r>
-            <a:br/>
-            <a:r>
-              <a:t>   • Section 234B/C Advance Tax notice triggered</a:t>
-            </a:r>
-            <a:br/>
-            <a:r>
-              <a:t>   • 48-Hour execution cutoff timer initialized</a:t>
-            </a:r>
-            <a:br/>
-            <a:r>
-              <a:t>              │</a:t>
-            </a:r>
-            <a:br/>
-            <a:r>
-              <a:t>              ▼</a:t>
-            </a:r>
-            <a:br/>
-            <a:r>
-              <a:t>[ 3. DUAL-ENVELOPE ENCRYPTION &amp; SECURE DISPATCH ]</a:t>
-            </a:r>
-            <a:br/>
-            <a:r>
-              <a:t>   • Sensitive financial payload encrypted via AES-256-GCM</a:t>
-            </a:r>
-            <a:br/>
-            <a:r>
-              <a:t>   • Data Encryption Key (DEK) wrapped for client via PBKDF2(PAN_last4 + DOB)</a:t>
-            </a:r>
-            <a:br/>
-            <a:r>
-              <a:t>   • 256-bit high-entropy magic link dispatched via 1-click WhatsApp template</a:t>
-            </a:r>
-            <a:br/>
-            <a:r>
-              <a:t>              │</a:t>
-            </a:r>
-            <a:br/>
-            <a:r>
-              <a:t>              ▼</a:t>
-            </a:r>
-            <a:br/>
-            <a:r>
-              <a:t>[ 4. CLIENT ACCESS &amp; PASSWORD UNLOCK ]</a:t>
-            </a:r>
-            <a:br/>
-            <a:r>
-              <a:t>   • Rohan Mehta taps link on mobile smartphone (Zero PII visible prior to unlock)</a:t>
-            </a:r>
-            <a:br/>
-            <a:r>
-              <a:t>   • Enters client password (123414081978); browser receives signed 2-hour JWT</a:t>
-            </a:r>
-            <a:br/>
-            <a:r>
-              <a:t>   • Proposal decrypts: trade details, allocation bars, and advance tax calendar displayed</a:t>
-            </a:r>
-            <a:br/>
-            <a:r>
-              <a:t>              │</a:t>
-            </a:r>
-            <a:br/>
-            <a:r>
-              <a:t>              ▼</a:t>
-            </a:r>
-            <a:br/>
-            <a:r>
-              <a:t>[ 5. ADVISORY DISCUSSION &amp; STATUTORY CLARIFICATION ]</a:t>
-            </a:r>
-            <a:br/>
-            <a:r>
-              <a:t>   • In-app Mandate Chat clarifies single-stock risk ceiling on Tata Motors</a:t>
-            </a:r>
-            <a:br/>
-            <a:r>
-              <a:t>   • ⚠️ Legal boundary: Informal chat dialogue explicitly does NOT constitute trade consent</a:t>
-            </a:r>
-            <a:br/>
-            <a:r>
-              <a:t>              │</a:t>
-            </a:r>
-            <a:br/>
-            <a:r>
-              <a:t>              ▼</a:t>
-            </a:r>
-            <a:br/>
-            <a:r>
-              <a:t>[ 6. STATUTORY ACCEPTANCE &amp; 6-DIGIT OTP AUTHORIZATION ]</a:t>
-            </a:r>
-            <a:br/>
-            <a:r>
-              <a:t>   • Explicit acknowledgement of 3 statutory declarations (Reg 19, Tax, Section 65B)</a:t>
-            </a:r>
-            <a:br/>
-            <a:r>
-              <a:t>   • 6-digit cryptographic OTP verified (rate-limited, 3 attempts max before lockout)</a:t>
-            </a:r>
-            <a:br/>
-            <a:r>
-              <a:t>              │</a:t>
-            </a:r>
-            <a:br/>
-            <a:r>
-              <a:t>              ▼</a:t>
-            </a:r>
-            <a:br/>
-            <a:r>
-              <a:t>[ 7. ATOMIC REVOCATION &amp; SECTION 65B EVIDENCE LOCK ]</a:t>
-            </a:r>
-            <a:br/>
-            <a:r>
-              <a:t>   • Magic token permanently revoked to prevent replay attacks; mandate status = CONSENTED</a:t>
-            </a:r>
-            <a:br/>
-            <a:r>
-              <a:t>   • Chained SHA-256 audit record committed (IP, User-Agent, IST timestamp, hash digest)</a:t>
-            </a:r>
-            <a:br/>
-            <a:r>
-              <a:t>   • Official Section 65B Compliance Dossier Certificate generated and downloadable</a:t>
+              <a:defRPr sz="900" i="1">
+                <a:solidFill>
+                  <a:srgbClr val="475569"/>
+                </a:solidFill>
+                <a:latin typeface="Calibri"/>
+              </a:defRPr>
+            </a:pPr>
+            <a:r>
+              <a:t>Figure 7.1: Statutory Process Flow Diagram — SEBI Regulation 19 advisory formulation, Finance Act 2024 tax calculation, OTP authorization, and Section 63 BSA evidence lock.</a:t>
             </a:r>
           </a:p>
         </p:txBody>
@@ -13930,11 +13955,11 @@
               </a:defRPr>
             </a:pPr>
             <a:r>
-              <a:t>• Practice Workspace: Scoped view displaying active mandate statuses (Draft, Sent, Viewed, Consented, Expired) with real-time 48-hour countdown badges.</a:t>
-            </a:r>
-            <a:br/>
-            <a:r>
-              <a:t>• Frictionless Client Registry: Client management enforcing PAN syntax ([A-Z]{5}[0-9]{4}[A-Z]) and mobile number formatting.</a:t>
+              <a:t>• Practice Workspace: Scoped view displaying active mandate statuses (Draft, Sent, Viewed, Consented, Expired, Revoked) with real-time 48-hour countdown badges.</a:t>
+            </a:r>
+            <a:br/>
+            <a:r>
+              <a:t>• Client Registry: Client management enforcing PAN syntax ([A-Z]{5}[0-9]{4}[A-Z]), masked presentation (XXXXX1234F), and mobile number formatting.</a:t>
             </a:r>
             <a:br/>
             <a:r>
@@ -13942,7 +13967,7 @@
             </a:r>
             <a:br/>
             <a:r>
-              <a:t>• Instant Emergency Control: Single-click 'Revoke Link' feature allows advisers to immediately cancel dispatched proposals if market volatility occurs.</a:t>
+              <a:t>• Instant Emergency Revocation: Single-click 'Revoke Link' feature allows advisers to immediately cancel dispatched proposals if market volatility occurs.</a:t>
             </a:r>
           </a:p>
         </p:txBody>
@@ -14226,7 +14251,7 @@
               </a:defRPr>
             </a:pPr>
             <a:r>
-              <a:t>• Zero-Login Convenience: Clients tap the link received via WhatsApp/email without remembering passwords or downloading an app.</a:t>
+              <a:t>• Direct Magic Link Convenience: Clients tap the link received via email without remembering complex portal passwords or downloading an app.</a:t>
             </a:r>
             <a:br/>
             <a:r>
@@ -14234,11 +14259,11 @@
             </a:r>
             <a:br/>
             <a:r>
-              <a:t>• Transparent Trade Baskets: Exact share quantities, current market value, ISIN numbers, and transaction rationale displayed clearly.</a:t>
-            </a:r>
-            <a:br/>
-            <a:r>
-              <a:t>• Tax Accountability: Pre-computes exact rupee liability (₹11,440) so the client understands the net financial impact before consenting.</a:t>
+              <a:t>• Transparent Trade Baskets: Exact share quantities, current market value, ISIN numbers, and transaction rationale displayed clearly (Tata Motors, HDFC Bank -&gt; Bharat Bond, Gold ETF).</a:t>
+            </a:r>
+            <a:br/>
+            <a:r>
+              <a:t>• Tax Accountability: Pre-computes estimated rupee liability (₹11,440) so the client understands the net financial impact before consenting.</a:t>
             </a:r>
           </a:p>
         </p:txBody>

--- a/docs/FinConsent-Client-Presentation.pptx
+++ b/docs/FinConsent-Client-Presentation.pptx
@@ -5660,7 +5660,7 @@
               </a:defRPr>
             </a:pPr>
             <a:r>
-              <a:t>Enterprise Statutory Trade Authorization &amp; Tax Infrastructure for Indian RIAs</a:t>
+              <a:t>Enterprise Advisory Proposal Consent &amp; Tax Infrastructure for Indian RIAs</a:t>
             </a:r>
           </a:p>
           <a:p>
@@ -11922,7 +11922,7 @@
               </a:defRPr>
             </a:pPr>
             <a:r>
-              <a:t>1. Informal WhatsApp &amp; Email Approvals (Regulatory Rejection)</a:t>
+              <a:t>1. Informal Communication &amp; Evidentiary Fragmentation</a:t>
             </a:r>
           </a:p>
           <a:p>
@@ -11934,7 +11934,7 @@
               </a:defRPr>
             </a:pPr>
             <a:r>
-              <a:t>Advisers routinely gather approvals over text messages or calls. SEBI inspection teams reject informal communications under Regulation 19 record-keeping rules, leaving RIAs vulnerable to claims of unauthorized trading. Such communications fail Section 63 BSA electronic admissibility standards.</a:t>
+              <a:t>Advisers frequently communicate rebalancing proposals over chat or email. While discoverable, these unstructured records fragment rationale and create administrative collation overhead during SEBI Regulation 19 audits, failing Section 63 BSA electronic admissibility standards.</a:t>
             </a:r>
           </a:p>
         </p:txBody>
